--- a/training/decks/t1-ready.pptx
+++ b/training/decks/t1-ready.pptx
@@ -3873,7 +3873,7 @@
                 </a:solidFill>
                 <a:latin typeface="Noto Sans"/>
               </a:rPr>
-              <a:t>•  Start on the logo or a blank screen</a:t>
+              <a:t>•  Start on the idle screen; Space puts the first slide up</a:t>
             </a:r>
           </a:p>
           <a:p>

--- a/training/decks/t1-ready.pptx
+++ b/training/decks/t1-ready.pptx
@@ -588,7 +588,7 @@
           </a:p>
           <a:p>
             <a:r>
-              <a:t>Next: Training 2, Confident operator, practises the five surprises that happen on a real Sunday.</a:t>
+              <a:t>Next: Training Session 2, Confident operator, practises the five surprises that happen on a real Sunday.</a:t>
             </a:r>
           </a:p>
         </p:txBody>
@@ -3636,7 +3636,7 @@
                 </a:solidFill>
                 <a:latin typeface="Noto Sans"/>
               </a:rPr>
-              <a:t>Training 1</a:t>
+              <a:t>Training Session 1</a:t>
             </a:r>
           </a:p>
         </p:txBody>

--- a/training/decks/t1-ready.pptx
+++ b/training/decks/t1-ready.pptx
@@ -578,7 +578,7 @@
           <a:lstStyle/>
           <a:p>
             <a:r>
-              <a:t>Trainer: Walk through a real Sunday. Point out Close service in the bar at the top right.</a:t>
+              <a:t>Trainer: Walk through a real Sunday. Point out Close service at the bottom of the right side.</a:t>
             </a:r>
           </a:p>
           <a:p>
@@ -3905,7 +3905,7 @@
                 </a:solidFill>
                 <a:latin typeface="Noto Sans"/>
               </a:rPr>
-              <a:t>•  After: Close service, top right</a:t>
+              <a:t>•  After: Close service, bottom right</a:t>
             </a:r>
           </a:p>
         </p:txBody>
